--- a/chapter 24.pptx
+++ b/chapter 24.pptx
@@ -241,7 +241,7 @@
           <a:p>
             <a:fld id="{13928E3B-7122-43E6-B3BB-09448C56C96C}" type="datetimeFigureOut">
               <a:rPr lang="en-US" smtClean="0"/>
-              <a:t>25/07/16</a:t>
+              <a:t>25/07/25</a:t>
             </a:fld>
             <a:endParaRPr lang="en-US" dirty="0"/>
           </a:p>
@@ -419,7 +419,7 @@
           <a:p>
             <a:fld id="{B98C9CAF-43DF-44BF-8016-DC193E4E594B}" type="datetimeFigureOut">
               <a:rPr lang="en-US" smtClean="0"/>
-              <a:t>25/07/16</a:t>
+              <a:t>25/07/25</a:t>
             </a:fld>
             <a:endParaRPr lang="en-US" dirty="0"/>
           </a:p>
@@ -685,6 +685,90 @@
     </a:lvl9pPr>
   </p:notesStyle>
 </p:notesMaster>
+</file>
+
+<file path=ppt/notesSlides/notesSlide1.xml><?xml version="1.0" encoding="utf-8"?>
+<p:notes xmlns:a="http://schemas.openxmlformats.org/drawingml/2006/main" xmlns:r="http://schemas.openxmlformats.org/officeDocument/2006/relationships" xmlns:p="http://schemas.openxmlformats.org/presentationml/2006/main">
+  <p:cSld>
+    <p:spTree>
+      <p:nvGrpSpPr>
+        <p:cNvPr id="1" name=""/>
+        <p:cNvGrpSpPr/>
+        <p:nvPr/>
+      </p:nvGrpSpPr>
+      <p:grpSpPr>
+        <a:xfrm>
+          <a:off x="0" y="0"/>
+          <a:ext cx="0" cy="0"/>
+          <a:chOff x="0" y="0"/>
+          <a:chExt cx="0" cy="0"/>
+        </a:xfrm>
+      </p:grpSpPr>
+      <p:sp>
+        <p:nvSpPr>
+          <p:cNvPr id="2" name="Slide Image Placeholder 1"/>
+          <p:cNvSpPr>
+            <a:spLocks noGrp="1" noRot="1" noChangeAspect="1"/>
+          </p:cNvSpPr>
+          <p:nvPr>
+            <p:ph type="sldImg"/>
+          </p:nvPr>
+        </p:nvSpPr>
+        <p:spPr/>
+      </p:sp>
+      <p:sp>
+        <p:nvSpPr>
+          <p:cNvPr id="3" name="Notes Placeholder 2"/>
+          <p:cNvSpPr>
+            <a:spLocks noGrp="1"/>
+          </p:cNvSpPr>
+          <p:nvPr>
+            <p:ph type="body" idx="1"/>
+          </p:nvPr>
+        </p:nvSpPr>
+        <p:spPr/>
+        <p:txBody>
+          <a:bodyPr/>
+          <a:lstStyle/>
+          <a:p>
+            <a:endParaRPr lang="en-US" dirty="0"/>
+          </a:p>
+        </p:txBody>
+      </p:sp>
+      <p:sp>
+        <p:nvSpPr>
+          <p:cNvPr id="4" name="Slide Number Placeholder 3"/>
+          <p:cNvSpPr>
+            <a:spLocks noGrp="1"/>
+          </p:cNvSpPr>
+          <p:nvPr>
+            <p:ph type="sldNum" sz="quarter" idx="5"/>
+          </p:nvPr>
+        </p:nvSpPr>
+        <p:spPr/>
+        <p:txBody>
+          <a:bodyPr/>
+          <a:lstStyle/>
+          <a:p>
+            <a:fld id="{F7C232D7-2694-4BD6-985B-15C23CEC77DD}" type="slidenum">
+              <a:rPr lang="en-US" smtClean="0"/>
+              <a:t>4</a:t>
+            </a:fld>
+            <a:endParaRPr lang="en-US" dirty="0"/>
+          </a:p>
+        </p:txBody>
+      </p:sp>
+    </p:spTree>
+    <p:extLst>
+      <p:ext uri="{BB962C8B-B14F-4D97-AF65-F5344CB8AC3E}">
+        <p14:creationId xmlns:p14="http://schemas.microsoft.com/office/powerpoint/2010/main" val="3879000138"/>
+      </p:ext>
+    </p:extLst>
+  </p:cSld>
+  <p:clrMapOvr>
+    <a:masterClrMapping/>
+  </p:clrMapOvr>
+</p:notes>
 </file>
 
 <file path=ppt/slideLayouts/slideLayout1.xml><?xml version="1.0" encoding="utf-8"?>
@@ -4338,7 +4422,28 @@
           <a:bodyPr/>
           <a:lstStyle/>
           <a:p>
-            <a:endParaRPr lang="en-US" dirty="0"/>
+            <a:r>
+              <a:rPr lang="en-US" dirty="0"/>
+              <a:t>In this chapter, we discussed the architect’s responsibilities, deriving from the realities of development projects.</a:t>
+            </a:r>
+          </a:p>
+          <a:p>
+            <a:r>
+              <a:rPr lang="en-US" dirty="0"/>
+              <a:t>The project manager and the software architect may be seen as occupying complementary roles: The manager runs the project from an administrative perspective, and the architect runs the project from a technical solution perspective.</a:t>
+            </a:r>
+          </a:p>
+          <a:p>
+            <a:r>
+              <a:rPr lang="en-US" dirty="0"/>
+              <a:t>In a project, architectures do not spring fully formed from Zeus’s forehead, but rather are released in increments that are useful to stakeholders.</a:t>
+            </a:r>
+          </a:p>
+          <a:p>
+            <a:r>
+              <a:rPr lang="en-US" dirty="0"/>
+              <a:t>Agile methodologies focus on incremental development. Over time, architecture and Agile (although they got off to a rough start together) have become indispensable partners.</a:t>
+            </a:r>
           </a:p>
         </p:txBody>
       </p:sp>
@@ -4653,7 +4758,40 @@
           <a:bodyPr/>
           <a:lstStyle/>
           <a:p>
-            <a:endParaRPr lang="en-US" dirty="0"/>
+            <a:r>
+              <a:rPr lang="en-US" dirty="0"/>
+              <a:t>Introduction</a:t>
+            </a:r>
+          </a:p>
+          <a:p>
+            <a:r>
+              <a:rPr lang="en-US" dirty="0"/>
+              <a:t>The Architect and the Project Manager</a:t>
+            </a:r>
+          </a:p>
+          <a:p>
+            <a:r>
+              <a:rPr lang="en-US" dirty="0"/>
+              <a:t>Incremental Architecture and Stakeholders</a:t>
+            </a:r>
+          </a:p>
+          <a:p>
+            <a:r>
+              <a:rPr lang="en-US" dirty="0"/>
+              <a:t>Architecture and Agile Development</a:t>
+            </a:r>
+          </a:p>
+          <a:p>
+            <a:r>
+              <a:rPr lang="en-US" dirty="0"/>
+              <a:t>Architecture and Distributed Development</a:t>
+            </a:r>
+          </a:p>
+          <a:p>
+            <a:r>
+              <a:rPr lang="en-US" dirty="0"/>
+              <a:t>Summary</a:t>
+            </a:r>
           </a:p>
         </p:txBody>
       </p:sp>

--- a/chapter 24.pptx
+++ b/chapter 24.pptx
@@ -23,7 +23,7 @@
     <p:sldId id="295" r:id="rId11"/>
     <p:sldId id="297" r:id="rId12"/>
     <p:sldId id="298" r:id="rId13"/>
-    <p:sldId id="299" r:id="rId14"/>
+    <p:sldId id="302" r:id="rId14"/>
     <p:sldId id="300" r:id="rId15"/>
     <p:sldId id="301" r:id="rId16"/>
     <p:sldId id="288" r:id="rId17"/>
@@ -3990,12 +3990,43 @@
           <a:chExt cx="0" cy="0"/>
         </a:xfrm>
       </p:grpSpPr>
-      <p:sp>
-        <p:nvSpPr>
-          <p:cNvPr id="2" name="Content Placeholder 1">
-            <a:extLst>
-              <a:ext uri="{FF2B5EF4-FFF2-40B4-BE49-F238E27FC236}">
-                <a16:creationId xmlns:a16="http://schemas.microsoft.com/office/drawing/2014/main" id="{7A46A5BF-3021-B4DC-D34A-65FF301D90BC}"/>
+      <p:pic>
+        <p:nvPicPr>
+          <p:cNvPr id="8" name="Picture Placeholder 7">
+            <a:extLst>
+              <a:ext uri="{FF2B5EF4-FFF2-40B4-BE49-F238E27FC236}">
+                <a16:creationId xmlns:a16="http://schemas.microsoft.com/office/drawing/2014/main" id="{7F5B6B3B-D67B-BEF2-3828-90F8DD89EAF5}"/>
+              </a:ext>
+            </a:extLst>
+          </p:cNvPr>
+          <p:cNvPicPr>
+            <a:picLocks noGrp="1" noChangeAspect="1"/>
+          </p:cNvPicPr>
+          <p:nvPr>
+            <p:ph type="pic" sz="quarter" idx="11"/>
+          </p:nvPr>
+        </p:nvPicPr>
+        <p:blipFill rotWithShape="1">
+          <a:blip r:embed="rId2">
+            <a:extLst>
+              <a:ext uri="{28A0092B-C50C-407E-A947-70E740481C1C}">
+                <a14:useLocalDpi xmlns:a14="http://schemas.microsoft.com/office/drawing/2010/main" val="0"/>
+              </a:ext>
+            </a:extLst>
+          </a:blip>
+          <a:srcRect l="-2034" r="-2034"/>
+          <a:stretch>
+            <a:fillRect/>
+          </a:stretch>
+        </p:blipFill>
+        <p:spPr/>
+      </p:pic>
+      <p:sp>
+        <p:nvSpPr>
+          <p:cNvPr id="3" name="Content Placeholder 2">
+            <a:extLst>
+              <a:ext uri="{FF2B5EF4-FFF2-40B4-BE49-F238E27FC236}">
+                <a16:creationId xmlns:a16="http://schemas.microsoft.com/office/drawing/2014/main" id="{927268E3-139E-6B60-EF1A-45F8AACF8C06}"/>
               </a:ext>
             </a:extLst>
           </p:cNvPr>
@@ -4035,36 +4066,24 @@
             </a:r>
           </a:p>
           <a:p>
-            <a:r>
-              <a:rPr lang="en-US" dirty="0"/>
-              <a:t>Labor costs vary depending on location, and there is a perception that moving some development to a low-cost venue will inevitably decrease the overall cost of the project.</a:t>
-            </a:r>
-          </a:p>
-          <a:p>
-            <a:r>
-              <a:rPr lang="en-US" dirty="0"/>
-              <a:t>Benefits include potential cost savings, access to broader skill sets, and better local market knowledge; however, these come with coordination and communication challenges.</a:t>
-            </a:r>
-          </a:p>
-          <a:p>
             <a:endParaRPr lang="en-US" dirty="0"/>
           </a:p>
         </p:txBody>
       </p:sp>
       <p:sp>
         <p:nvSpPr>
-          <p:cNvPr id="3" name="Title 2">
-            <a:extLst>
-              <a:ext uri="{FF2B5EF4-FFF2-40B4-BE49-F238E27FC236}">
-                <a16:creationId xmlns:a16="http://schemas.microsoft.com/office/drawing/2014/main" id="{F9C0E49C-A1EA-CF68-386F-77AF3875858D}"/>
-              </a:ext>
-            </a:extLst>
-          </p:cNvPr>
-          <p:cNvSpPr>
-            <a:spLocks noGrp="1"/>
-          </p:cNvSpPr>
-          <p:nvPr>
-            <p:ph type="title"/>
+          <p:cNvPr id="4" name="Content Placeholder 3">
+            <a:extLst>
+              <a:ext uri="{FF2B5EF4-FFF2-40B4-BE49-F238E27FC236}">
+                <a16:creationId xmlns:a16="http://schemas.microsoft.com/office/drawing/2014/main" id="{01AA2827-BAF1-F5D3-F616-53107D061860}"/>
+              </a:ext>
+            </a:extLst>
+          </p:cNvPr>
+          <p:cNvSpPr>
+            <a:spLocks noGrp="1"/>
+          </p:cNvSpPr>
+          <p:nvPr>
+            <p:ph sz="half" idx="12"/>
           </p:nvPr>
         </p:nvSpPr>
         <p:spPr/>
@@ -4074,6 +4093,43 @@
           <a:p>
             <a:r>
               <a:rPr lang="en-US" dirty="0"/>
+              <a:t>Labor costs vary depending on location, and there is a perception that moving some development to a low-cost venue will inevitably decrease the overall cost of the project.</a:t>
+            </a:r>
+          </a:p>
+          <a:p>
+            <a:r>
+              <a:rPr lang="en-US" dirty="0"/>
+              <a:t>Benefits include potential cost savings, access to broader skill sets, and better local market knowledge; however, these come with coordination and communication challenges.</a:t>
+            </a:r>
+          </a:p>
+          <a:p>
+            <a:endParaRPr lang="en-US" dirty="0"/>
+          </a:p>
+        </p:txBody>
+      </p:sp>
+      <p:sp>
+        <p:nvSpPr>
+          <p:cNvPr id="5" name="Title 4">
+            <a:extLst>
+              <a:ext uri="{FF2B5EF4-FFF2-40B4-BE49-F238E27FC236}">
+                <a16:creationId xmlns:a16="http://schemas.microsoft.com/office/drawing/2014/main" id="{346B14D2-D07A-72E6-3BEB-26FC8F513614}"/>
+              </a:ext>
+            </a:extLst>
+          </p:cNvPr>
+          <p:cNvSpPr>
+            <a:spLocks noGrp="1"/>
+          </p:cNvSpPr>
+          <p:nvPr>
+            <p:ph type="title"/>
+          </p:nvPr>
+        </p:nvSpPr>
+        <p:spPr/>
+        <p:txBody>
+          <a:bodyPr/>
+          <a:lstStyle/>
+          <a:p>
+            <a:r>
+              <a:rPr lang="en-US" dirty="0"/>
               <a:t>Architecture and Distributed Development</a:t>
             </a:r>
           </a:p>
@@ -4081,18 +4137,18 @@
       </p:sp>
       <p:sp>
         <p:nvSpPr>
-          <p:cNvPr id="4" name="Slide Number Placeholder 3">
-            <a:extLst>
-              <a:ext uri="{FF2B5EF4-FFF2-40B4-BE49-F238E27FC236}">
-                <a16:creationId xmlns:a16="http://schemas.microsoft.com/office/drawing/2014/main" id="{66FB6150-2726-FB45-111B-E30E90B63889}"/>
-              </a:ext>
-            </a:extLst>
-          </p:cNvPr>
-          <p:cNvSpPr>
-            <a:spLocks noGrp="1"/>
-          </p:cNvSpPr>
-          <p:nvPr>
-            <p:ph type="sldNum" sz="quarter" idx="10"/>
+          <p:cNvPr id="6" name="Slide Number Placeholder 5">
+            <a:extLst>
+              <a:ext uri="{FF2B5EF4-FFF2-40B4-BE49-F238E27FC236}">
+                <a16:creationId xmlns:a16="http://schemas.microsoft.com/office/drawing/2014/main" id="{CFAD6C6D-6B74-B543-69C4-49EFA0CA7636}"/>
+              </a:ext>
+            </a:extLst>
+          </p:cNvPr>
+          <p:cNvSpPr>
+            <a:spLocks noGrp="1"/>
+          </p:cNvSpPr>
+          <p:nvPr>
+            <p:ph type="sldNum" sz="quarter" idx="13"/>
           </p:nvPr>
         </p:nvSpPr>
         <p:spPr/>
@@ -4112,7 +4168,7 @@
     </p:spTree>
     <p:extLst>
       <p:ext uri="{BB962C8B-B14F-4D97-AF65-F5344CB8AC3E}">
-        <p14:creationId xmlns:p14="http://schemas.microsoft.com/office/powerpoint/2010/main" val="893270861"/>
+        <p14:creationId xmlns:p14="http://schemas.microsoft.com/office/powerpoint/2010/main" val="2074707685"/>
       </p:ext>
     </p:extLst>
   </p:cSld>
@@ -4162,7 +4218,7 @@
           <a:p>
             <a:r>
               <a:rPr lang="en-US" dirty="0"/>
-              <a:t>Assume Module A uses an interface from Module B. So the team responsible for Module B must coordinate with the team responsible for Module A.</a:t>
+              <a:t>Assume Module A uses an interface from Module B. So, the team responsible for Module B must coordinate with the team responsible for Module A.</a:t>
             </a:r>
           </a:p>
           <a:p>

--- a/chapter 24.pptx
+++ b/chapter 24.pptx
@@ -3645,25 +3645,7 @@
           <a:p>
             <a:r>
               <a:rPr lang="en-US" dirty="0"/>
-              <a:t>If and when requirements change, adopt a practice of Agile, where </a:t>
-            </a:r>
-            <a:r>
-              <a:rPr lang="en-US" dirty="0">
-                <a:solidFill>
-                  <a:schemeClr val="accent1"/>
-                </a:solidFill>
-              </a:rPr>
-              <a:t>spikes</a:t>
-            </a:r>
-            <a:r>
-              <a:rPr lang="en-US" dirty="0"/>
-              <a:t> are used to address new requirements.</a:t>
-            </a:r>
-          </a:p>
-          <a:p>
-            <a:r>
-              <a:rPr lang="en-US" dirty="0"/>
-              <a:t>A </a:t>
+              <a:t>When requirements change, you should follow an Agile practice called a "</a:t>
             </a:r>
             <a:r>
               <a:rPr lang="en-US" dirty="0">
@@ -3675,13 +3657,31 @@
             </a:r>
             <a:r>
               <a:rPr lang="en-US" dirty="0"/>
+              <a:t>." </a:t>
+            </a:r>
+          </a:p>
+          <a:p>
+            <a:r>
+              <a:rPr lang="en-US" dirty="0"/>
+              <a:t>A </a:t>
+            </a:r>
+            <a:r>
+              <a:rPr lang="en-US" dirty="0">
+                <a:solidFill>
+                  <a:schemeClr val="accent1"/>
+                </a:solidFill>
+              </a:rPr>
+              <a:t>spike</a:t>
+            </a:r>
+            <a:r>
+              <a:rPr lang="en-US" dirty="0"/>
               <a:t> is a time-boxed task to answer a technical question or gather information; it is not intended to lead to a finished product.</a:t>
             </a:r>
           </a:p>
           <a:p>
             <a:r>
               <a:rPr lang="en-US" dirty="0"/>
-              <a:t>The Agile Manifesto of 2001, the “Prime Directive” of the Agile movement, implies that architecture is emergent and does not need to be planned or designed up-front.</a:t>
+              <a:t>The Agile Manifesto of 2001, the Prime Directive of the Agile movement, implies that architecture is emergent and does not need to be planned or designed up-front.</a:t>
             </a:r>
           </a:p>
           <a:p>
@@ -3821,35 +3821,27 @@
             </a:r>
             <a:r>
               <a:rPr lang="en-US" dirty="0"/>
-              <a:t>(</a:t>
-            </a:r>
-            <a:r>
-              <a:rPr lang="en-US" dirty="0" err="1"/>
+              <a:t>(SAFe).</a:t>
+            </a:r>
+          </a:p>
+          <a:p>
+            <a:r>
+              <a:rPr lang="en-US" dirty="0">
+                <a:solidFill>
+                  <a:schemeClr val="accent1"/>
+                </a:solidFill>
+              </a:rPr>
               <a:t>SAFe</a:t>
             </a:r>
             <a:r>
               <a:rPr lang="en-US" dirty="0"/>
-              <a:t>).</a:t>
-            </a:r>
-          </a:p>
-          <a:p>
-            <a:r>
-              <a:rPr lang="en-US" dirty="0" err="1"/>
-              <a:t>SAFe</a:t>
-            </a:r>
-            <a:r>
-              <a:rPr lang="en-US" dirty="0"/>
               <a:t> provides a reference model of workflows, roles, and processes to successfully produce a large-scale system.</a:t>
             </a:r>
           </a:p>
           <a:p>
             <a:r>
-              <a:rPr lang="en-US" dirty="0" err="1"/>
-              <a:t>SAFe</a:t>
-            </a:r>
-            <a:r>
-              <a:rPr lang="en-US" dirty="0"/>
-              <a:t> acknowledges the role of architecture. It suggests </a:t>
+              <a:rPr lang="en-US" dirty="0"/>
+              <a:t>SAFe acknowledges the role of architecture. It suggests </a:t>
             </a:r>
             <a:r>
               <a:rPr lang="en-US" dirty="0">
@@ -3880,12 +3872,8 @@
           </a:p>
           <a:p>
             <a:r>
-              <a:rPr lang="en-US" dirty="0" err="1"/>
-              <a:t>SAFe</a:t>
-            </a:r>
-            <a:r>
-              <a:rPr lang="en-US" dirty="0"/>
-              <a:t> also counsels a counterbalancing force called </a:t>
+              <a:rPr lang="en-US" dirty="0"/>
+              <a:t>SAFe also counsels a counterbalancing force called </a:t>
             </a:r>
             <a:r>
               <a:rPr lang="en-US" dirty="0">
@@ -4044,7 +4032,7 @@
           <a:p>
             <a:r>
               <a:rPr lang="en-US" dirty="0"/>
-              <a:t>Most substantial projects today are developed by </a:t>
+              <a:t>Most big projects today are developed by </a:t>
             </a:r>
             <a:r>
               <a:rPr lang="en-US" dirty="0">
@@ -4093,7 +4081,7 @@
           <a:p>
             <a:r>
               <a:rPr lang="en-US" dirty="0"/>
-              <a:t>Labor costs vary depending on location, and there is a perception that moving some development to a low-cost venue will inevitably decrease the overall cost of the project.</a:t>
+              <a:t>Wages are different in different places, and many believe that sending part of the work to countries with lower labor costs will automatically make the whole project cheaper.</a:t>
             </a:r>
           </a:p>
           <a:p>
@@ -4224,7 +4212,7 @@
           <a:p>
             <a:r>
               <a:rPr lang="en-US" dirty="0"/>
-              <a:t>Coordination is easy if it involves a short conversation at the shared vending machines, but it’s not so easy if it involves a preplanned web conference at a time when it is the middle of the night for one of the teams.</a:t>
+              <a:t>It’s easy to coordinate when team members are in the same place and can quickly talk in person, like while getting a snack. But it’s much harder when teams are far apart and have to plan online meetings, especially if it’s nighttime for some of them.</a:t>
             </a:r>
           </a:p>
           <a:p>
@@ -4486,19 +4474,27 @@
           <a:p>
             <a:r>
               <a:rPr lang="en-US" dirty="0"/>
-              <a:t>The project manager and the software architect may be seen as occupying complementary roles: The manager runs the project from an administrative perspective, and the architect runs the project from a technical solution perspective.</a:t>
-            </a:r>
-          </a:p>
-          <a:p>
-            <a:r>
-              <a:rPr lang="en-US" dirty="0"/>
-              <a:t>In a project, architectures do not spring fully formed from Zeus’s forehead, but rather are released in increments that are useful to stakeholders.</a:t>
-            </a:r>
-          </a:p>
-          <a:p>
-            <a:r>
-              <a:rPr lang="en-US" dirty="0"/>
-              <a:t>Agile methodologies focus on incremental development. Over time, architecture and Agile (although they got off to a rough start together) have become indispensable partners.</a:t>
+              <a:t>The project manager and the software architect have different but complementary roles. The manager runs the project from an administrative perspective, and the architect runs the project from a technical solution perspective.</a:t>
+            </a:r>
+          </a:p>
+          <a:p>
+            <a:r>
+              <a:rPr lang="en-US" dirty="0"/>
+              <a:t>In real projects, software architectures aren’t created all at once or instantly. Instead, they are developed and shared step by step, in parts that are useful to the people </a:t>
+            </a:r>
+            <a:r>
+              <a:rPr lang="en-US"/>
+              <a:t>involved.</a:t>
+            </a:r>
+          </a:p>
+          <a:p>
+            <a:r>
+              <a:rPr lang="en-US"/>
+              <a:t>Agile </a:t>
+            </a:r>
+            <a:r>
+              <a:rPr lang="en-US" dirty="0"/>
+              <a:t>methodologies focus on incremental development. Over time, architecture and Agile (although they got off to a rough start together) have become indispensable partners.</a:t>
             </a:r>
           </a:p>
         </p:txBody>
@@ -5084,7 +5080,7 @@
           <a:p>
             <a:r>
               <a:rPr lang="en-US" dirty="0"/>
-              <a:t>The project manager is responsible for the overall performance of the project—typically for keeping it on budget, on schedule, and staffed with the right people doing the right jobs.</a:t>
+              <a:t>The project manager is responsible for the overall performance of the project, typically for keeping it on budget, on schedule, and staffed with the right people doing the right jobs.</a:t>
             </a:r>
           </a:p>
           <a:p>
@@ -5218,7 +5214,7 @@
           <a:p>
             <a:r>
               <a:rPr lang="en-US" dirty="0"/>
-              <a:t>Agile methodologies are built on the pillar of incremental development, with each increment delivering value to the customer or user.</a:t>
+              <a:t>Agile methodologies are based on incremental development, with each increment delivering value to the customer or user.</a:t>
             </a:r>
           </a:p>
           <a:p>
@@ -5234,11 +5230,11 @@
                   <a:schemeClr val="accent1"/>
                 </a:solidFill>
               </a:rPr>
-              <a:t>Incremental architecture </a:t>
-            </a:r>
-            <a:r>
-              <a:rPr lang="en-US" dirty="0"/>
-              <a:t>aligns with the project’s test and release rhythm, regardless of whether Agile is used.</a:t>
+              <a:t>Incremental architecture</a:t>
+            </a:r>
+            <a:r>
+              <a:rPr lang="en-US" dirty="0"/>
+              <a:t>, then, is about releasing the architecture in increments. Specifically, this means releasing architecture documentation in increments. So, architect should decide which views to release and at which depth.</a:t>
             </a:r>
           </a:p>
         </p:txBody>
@@ -5354,19 +5350,101 @@
           <a:p>
             <a:r>
               <a:rPr lang="en-US" dirty="0"/>
-              <a:t>Incremental architecture, then, is about releasing the architecture in increments.</a:t>
-            </a:r>
-          </a:p>
-          <a:p>
-            <a:r>
-              <a:rPr lang="en-US" dirty="0"/>
-              <a:t>Incremental architecture involves releasing architectural documentation incrementally, including selected views at appropriate depths.</a:t>
-            </a:r>
-          </a:p>
-          <a:p>
-            <a:r>
-              <a:rPr lang="en-US" dirty="0"/>
-              <a:t>Stakeholder concerns and priorities should drive what architectural content is released in each increment.</a:t>
+              <a:t>consider these as candidates for your first increment:</a:t>
+            </a:r>
+          </a:p>
+          <a:p>
+            <a:pPr lvl="1"/>
+            <a:r>
+              <a:rPr lang="en-US" dirty="0">
+                <a:solidFill>
+                  <a:schemeClr val="accent4">
+                    <a:lumMod val="50000"/>
+                  </a:schemeClr>
+                </a:solidFill>
+              </a:rPr>
+              <a:t>A Module decomposition structure: </a:t>
+            </a:r>
+            <a:r>
+              <a:rPr lang="en-US" dirty="0"/>
+              <a:t>Helps organize the team and project by showing how the system is divided into parts. It guides team setup and budgeting.</a:t>
+            </a:r>
+          </a:p>
+          <a:p>
+            <a:pPr lvl="1"/>
+            <a:r>
+              <a:rPr lang="en-US" dirty="0">
+                <a:solidFill>
+                  <a:schemeClr val="accent4">
+                    <a:lumMod val="50000"/>
+                  </a:schemeClr>
+                </a:solidFill>
+              </a:rPr>
+              <a:t>A</a:t>
+            </a:r>
+            <a:r>
+              <a:rPr lang="en-US" b="1" dirty="0">
+                <a:solidFill>
+                  <a:schemeClr val="accent4">
+                    <a:lumMod val="50000"/>
+                  </a:schemeClr>
+                </a:solidFill>
+              </a:rPr>
+              <a:t> </a:t>
+            </a:r>
+            <a:r>
+              <a:rPr lang="en-US" dirty="0">
+                <a:solidFill>
+                  <a:schemeClr val="accent4">
+                    <a:lumMod val="50000"/>
+                  </a:schemeClr>
+                </a:solidFill>
+              </a:rPr>
+              <a:t>Module "uses" structure: </a:t>
+            </a:r>
+            <a:r>
+              <a:rPr lang="en-US" dirty="0"/>
+              <a:t>Shows how different parts of the system depend on each other. This helps plan the order of development and supports releasing the system in stages.</a:t>
+            </a:r>
+          </a:p>
+          <a:p>
+            <a:pPr lvl="1"/>
+            <a:r>
+              <a:rPr lang="en-US" dirty="0">
+                <a:solidFill>
+                  <a:schemeClr val="accent4">
+                    <a:lumMod val="50000"/>
+                  </a:schemeClr>
+                </a:solidFill>
+              </a:rPr>
+              <a:t>A C&amp;C structure:</a:t>
+            </a:r>
+            <a:r>
+              <a:rPr lang="en-US" dirty="0"/>
+              <a:t> Shows the main parts of the system and how they work together. It gives a clear view of the overall solution.</a:t>
+            </a:r>
+          </a:p>
+          <a:p>
+            <a:pPr lvl="1"/>
+            <a:r>
+              <a:rPr lang="en-US" dirty="0">
+                <a:solidFill>
+                  <a:schemeClr val="accent4">
+                    <a:lumMod val="50000"/>
+                  </a:schemeClr>
+                </a:solidFill>
+              </a:rPr>
+              <a:t>A Deployment structure: </a:t>
+            </a:r>
+            <a:r>
+              <a:rPr lang="en-US" dirty="0"/>
+              <a:t>Shows where the system will run, like on mobile phones or in the cloud.</a:t>
+            </a:r>
+          </a:p>
+          <a:p>
+            <a:r>
+              <a:rPr lang="en-US" dirty="0"/>
+              <a:t>After that, use the needs of the architecture’s stakeholders as a guide when crafting the contents of subsequent releases.</a:t>
             </a:r>
           </a:p>
         </p:txBody>
@@ -5487,12 +5565,8 @@
           </a:p>
           <a:p>
             <a:r>
-              <a:rPr lang="en-US" dirty="0" err="1"/>
-              <a:t>Agilistas</a:t>
-            </a:r>
-            <a:r>
-              <a:rPr lang="en-US" dirty="0"/>
-              <a:t> advocate allocating resources that might otherwise be spent on documentation, to what the customer really wants, starting very early on.</a:t>
+              <a:rPr lang="en-US" dirty="0"/>
+              <a:t>Agile prefers to use time and resources for building what the customer actually needs, instead of spending too much on documentation, and they start doing this early in the project.</a:t>
             </a:r>
           </a:p>
           <a:p>
